--- a/public/fun/cards/life/life-15.pptx
+++ b/public/fun/cards/life/life-15.pptx
@@ -3085,7 +3085,7 @@
     <p:bg>
       <p:bgPr>
         <a:solidFill>
-          <a:srgbClr val="FBF8F2"/>
+          <a:srgbClr val="E6EAF2"/>
         </a:solidFill>
         <a:effectLst/>
       </p:bgPr>
@@ -3105,43 +3105,14 @@
         </p:nvSpPr>
         <p:spPr>
           <a:xfrm>
-            <a:off x="187200" y="403200"/>
-            <a:ext cx="993600" cy="993600"/>
-          </a:xfrm>
-          <a:prstGeom prst="ellipse">
-            <a:avLst/>
-          </a:prstGeom>
-          <a:noFill/>
-          <a:ln w="14400">
-            <a:solidFill>
-              <a:srgbClr val="C8E0D9"/>
-            </a:solidFill>
-          </a:ln>
-        </p:spPr>
-        <p:txBody>
-          <a:bodyPr rtlCol="0" anchor="ctr"/>
-          <a:lstStyle/>
-          <a:p>
-            <a:pPr algn="ctr"/>
-          </a:p>
-        </p:txBody>
-      </p:sp>
-      <p:sp>
-        <p:nvSpPr>
-          <p:cNvPr id="3" name="Oval 2"/>
-          <p:cNvSpPr/>
-          <p:nvPr/>
-        </p:nvSpPr>
-        <p:spPr>
-          <a:xfrm>
-            <a:off x="259200" y="475200"/>
-            <a:ext cx="849600" cy="849600"/>
+            <a:off x="1591200" y="208800"/>
+            <a:ext cx="57600" cy="57600"/>
           </a:xfrm>
           <a:prstGeom prst="ellipse">
             <a:avLst/>
           </a:prstGeom>
           <a:solidFill>
-            <a:srgbClr val="3B9177"/>
+            <a:srgbClr val="0A2F7A"/>
           </a:solidFill>
           <a:ln>
             <a:noFill/>
@@ -3157,14 +3128,14 @@
       </p:sp>
       <p:sp>
         <p:nvSpPr>
-          <p:cNvPr id="4" name="텍스트"/>
+          <p:cNvPr id="3" name="텍스트"/>
           <p:cNvSpPr txBox="1"/>
           <p:nvPr/>
         </p:nvSpPr>
         <p:spPr>
           <a:xfrm>
-            <a:off x="259200" y="612000"/>
-            <a:ext cx="849600" cy="576000"/>
+            <a:off x="360000" y="468000"/>
+            <a:ext cx="2520000" cy="360000"/>
           </a:xfrm>
           <a:prstGeom prst="rect">
             <a:avLst/>
@@ -3172,39 +3143,39 @@
           <a:noFill/>
         </p:spPr>
         <p:txBody>
-          <a:bodyPr wrap="square" lIns="0" rIns="0" tIns="0" bIns="0" anchor="ctr">
+          <a:bodyPr wrap="square" lIns="0" rIns="0" tIns="0" bIns="0" anchor="t">
             <a:spAutoFit/>
           </a:bodyPr>
           <a:lstStyle/>
           <a:p>
             <a:pPr algn="ctr">
               <a:lnSpc>
-                <a:spcPts val="6959"/>
+                <a:spcPts val="3190"/>
               </a:lnSpc>
             </a:pPr>
             <a:r>
-              <a:rPr sz="4800" b="1">
+              <a:rPr sz="2200" b="1">
                 <a:solidFill>
-                  <a:srgbClr val="FFFFFF"/>
+                  <a:srgbClr val="12151C"/>
                 </a:solidFill>
-                <a:latin typeface="바탕"/>
-                <a:ea typeface="바탕"/>
+                <a:latin typeface="맑은 고딕"/>
+                <a:ea typeface="맑은 고딕"/>
               </a:rPr>
-              <a:t>권</a:t>
-            </a:r>
-          </a:p>
-        </p:txBody>
-      </p:sp>
-      <p:sp>
-        <p:nvSpPr>
-          <p:cNvPr id="5" name="텍스트"/>
+              <a:t>권다은</a:t>
+            </a:r>
+          </a:p>
+        </p:txBody>
+      </p:sp>
+      <p:sp>
+        <p:nvSpPr>
+          <p:cNvPr id="4" name="텍스트"/>
           <p:cNvSpPr txBox="1"/>
           <p:nvPr/>
         </p:nvSpPr>
         <p:spPr>
           <a:xfrm>
-            <a:off x="1332000" y="223200"/>
-            <a:ext cx="1728000" cy="100800"/>
+            <a:off x="360000" y="878400"/>
+            <a:ext cx="2520000" cy="171451"/>
           </a:xfrm>
           <a:prstGeom prst="rect">
             <a:avLst/>
@@ -3217,21 +3188,50 @@
           </a:bodyPr>
           <a:lstStyle/>
           <a:p>
-            <a:pPr algn="l">
+            <a:pPr algn="ctr">
               <a:lnSpc>
-                <a:spcPts val="1087"/>
+                <a:spcPts val="1305"/>
               </a:lnSpc>
             </a:pPr>
             <a:r>
-              <a:rPr sz="750" b="1" spc="150">
+              <a:rPr sz="900" b="0">
                 <a:solidFill>
-                  <a:srgbClr val="8C685D"/>
+                  <a:srgbClr val="0F1F40"/>
                 </a:solidFill>
                 <a:latin typeface="맑은 고딕"/>
                 <a:ea typeface="맑은 고딕"/>
               </a:rPr>
-              <a:t>상호명</a:t>
-            </a:r>
+              <a:t>인테리어 디자이너</a:t>
+            </a:r>
+          </a:p>
+        </p:txBody>
+      </p:sp>
+      <p:sp>
+        <p:nvSpPr>
+          <p:cNvPr id="5" name="Rectangle 4"/>
+          <p:cNvSpPr/>
+          <p:nvPr/>
+        </p:nvSpPr>
+        <p:spPr>
+          <a:xfrm>
+            <a:off x="1530000" y="1137600"/>
+            <a:ext cx="180000" cy="14400"/>
+          </a:xfrm>
+          <a:prstGeom prst="rect">
+            <a:avLst/>
+          </a:prstGeom>
+          <a:solidFill>
+            <a:srgbClr val="0A2F7A"/>
+          </a:solidFill>
+          <a:ln>
+            <a:noFill/>
+          </a:ln>
+        </p:spPr>
+        <p:txBody>
+          <a:bodyPr rtlCol="0" anchor="ctr"/>
+          <a:lstStyle/>
+          <a:p>
+            <a:pPr algn="ctr"/>
           </a:p>
         </p:txBody>
       </p:sp>
@@ -3243,8 +3243,8 @@
         </p:nvSpPr>
         <p:spPr>
           <a:xfrm>
-            <a:off x="1332000" y="424800"/>
-            <a:ext cx="1728000" cy="297182"/>
+            <a:off x="360000" y="1267200"/>
+            <a:ext cx="2520000" cy="133351"/>
           </a:xfrm>
           <a:prstGeom prst="rect">
             <a:avLst/>
@@ -3257,20 +3257,20 @@
           </a:bodyPr>
           <a:lstStyle/>
           <a:p>
-            <a:pPr algn="l">
+            <a:pPr algn="ctr">
               <a:lnSpc>
-                <a:spcPts val="2610"/>
+                <a:spcPts val="1015"/>
               </a:lnSpc>
             </a:pPr>
             <a:r>
-              <a:rPr sz="1800" b="1" spc="50">
+              <a:rPr sz="700" b="0">
                 <a:solidFill>
-                  <a:srgbClr val="5B2315"/>
+                  <a:srgbClr val="12151C"/>
                 </a:solidFill>
-                <a:latin typeface="바탕"/>
-                <a:ea typeface="바탕"/>
+                <a:latin typeface="맑은 고딕"/>
+                <a:ea typeface="맑은 고딕"/>
               </a:rPr>
-              <a:t>권다은</a:t>
+              <a:t>010-1234-5678      name@example.com</a:t>
             </a:r>
           </a:p>
         </p:txBody>
@@ -3283,8 +3283,8 @@
         </p:nvSpPr>
         <p:spPr>
           <a:xfrm>
-            <a:off x="1332000" y="705600"/>
-            <a:ext cx="1728000" cy="122400"/>
+            <a:off x="360000" y="1425600"/>
+            <a:ext cx="2520000" cy="133351"/>
           </a:xfrm>
           <a:prstGeom prst="rect">
             <a:avLst/>
@@ -3297,63 +3297,34 @@
           </a:bodyPr>
           <a:lstStyle/>
           <a:p>
-            <a:pPr algn="l">
+            <a:pPr algn="ctr">
               <a:lnSpc>
-                <a:spcPts val="1232"/>
+                <a:spcPts val="1015"/>
               </a:lnSpc>
             </a:pPr>
             <a:r>
-              <a:rPr sz="850" b="1">
+              <a:rPr sz="700" b="0">
                 <a:solidFill>
-                  <a:srgbClr val="327B65"/>
+                  <a:srgbClr val="0F1F40"/>
                 </a:solidFill>
                 <a:latin typeface="맑은 고딕"/>
                 <a:ea typeface="맑은 고딕"/>
               </a:rPr>
-              <a:t>인테리어 디자이너</a:t>
-            </a:r>
-          </a:p>
-        </p:txBody>
-      </p:sp>
-      <p:sp>
-        <p:nvSpPr>
-          <p:cNvPr id="8" name="Rectangle 7"/>
-          <p:cNvSpPr/>
+              <a:t>주소를 입력해 주세요</a:t>
+            </a:r>
+          </a:p>
+        </p:txBody>
+      </p:sp>
+      <p:sp>
+        <p:nvSpPr>
+          <p:cNvPr id="8" name="텍스트"/>
+          <p:cNvSpPr txBox="1"/>
           <p:nvPr/>
         </p:nvSpPr>
         <p:spPr>
           <a:xfrm>
-            <a:off x="1332000" y="907200"/>
-            <a:ext cx="201600" cy="14400"/>
-          </a:xfrm>
-          <a:prstGeom prst="rect">
-            <a:avLst/>
-          </a:prstGeom>
-          <a:solidFill>
-            <a:srgbClr val="3B9177"/>
-          </a:solidFill>
-          <a:ln>
-            <a:noFill/>
-          </a:ln>
-        </p:spPr>
-        <p:txBody>
-          <a:bodyPr rtlCol="0" anchor="ctr"/>
-          <a:lstStyle/>
-          <a:p>
-            <a:pPr algn="ctr"/>
-          </a:p>
-        </p:txBody>
-      </p:sp>
-      <p:sp>
-        <p:nvSpPr>
-          <p:cNvPr id="9" name="텍스트"/>
-          <p:cNvSpPr txBox="1"/>
-          <p:nvPr/>
-        </p:nvSpPr>
-        <p:spPr>
-          <a:xfrm>
-            <a:off x="1332000" y="1051200"/>
-            <a:ext cx="122400" cy="168911"/>
+            <a:off x="360000" y="1576800"/>
+            <a:ext cx="2520000" cy="104776"/>
           </a:xfrm>
           <a:prstGeom prst="rect">
             <a:avLst/>
@@ -3366,220 +3337,20 @@
           </a:bodyPr>
           <a:lstStyle/>
           <a:p>
-            <a:pPr algn="l">
+            <a:pPr algn="ctr">
               <a:lnSpc>
-                <a:spcPts val="1015"/>
+                <a:spcPts val="797"/>
               </a:lnSpc>
             </a:pPr>
             <a:r>
-              <a:rPr sz="700" b="1">
+              <a:rPr sz="550" b="1" spc="300">
                 <a:solidFill>
-                  <a:srgbClr val="327B65"/>
+                  <a:srgbClr val="0F1F40"/>
                 </a:solidFill>
                 <a:latin typeface="맑은 고딕"/>
                 <a:ea typeface="맑은 고딕"/>
               </a:rPr>
-              <a:t>T</a:t>
-            </a:r>
-          </a:p>
-        </p:txBody>
-      </p:sp>
-      <p:sp>
-        <p:nvSpPr>
-          <p:cNvPr id="10" name="텍스트"/>
-          <p:cNvSpPr txBox="1"/>
-          <p:nvPr/>
-        </p:nvSpPr>
-        <p:spPr>
-          <a:xfrm>
-            <a:off x="1476000" y="1051200"/>
-            <a:ext cx="1584000" cy="168911"/>
-          </a:xfrm>
-          <a:prstGeom prst="rect">
-            <a:avLst/>
-          </a:prstGeom>
-          <a:noFill/>
-        </p:spPr>
-        <p:txBody>
-          <a:bodyPr wrap="square" lIns="0" rIns="0" tIns="0" bIns="0" anchor="t">
-            <a:spAutoFit/>
-          </a:bodyPr>
-          <a:lstStyle/>
-          <a:p>
-            <a:pPr algn="l">
-              <a:lnSpc>
-                <a:spcPts val="1015"/>
-              </a:lnSpc>
-            </a:pPr>
-            <a:r>
-              <a:rPr sz="700" b="0">
-                <a:solidFill>
-                  <a:srgbClr val="5B2315"/>
-                </a:solidFill>
-                <a:latin typeface="맑은 고딕"/>
-                <a:ea typeface="맑은 고딕"/>
-              </a:rPr>
-              <a:t>010-1234-5678</a:t>
-            </a:r>
-          </a:p>
-        </p:txBody>
-      </p:sp>
-      <p:sp>
-        <p:nvSpPr>
-          <p:cNvPr id="11" name="텍스트"/>
-          <p:cNvSpPr txBox="1"/>
-          <p:nvPr/>
-        </p:nvSpPr>
-        <p:spPr>
-          <a:xfrm>
-            <a:off x="1332000" y="1220111"/>
-            <a:ext cx="122400" cy="168911"/>
-          </a:xfrm>
-          <a:prstGeom prst="rect">
-            <a:avLst/>
-          </a:prstGeom>
-          <a:noFill/>
-        </p:spPr>
-        <p:txBody>
-          <a:bodyPr wrap="square" lIns="0" rIns="0" tIns="0" bIns="0" anchor="t">
-            <a:spAutoFit/>
-          </a:bodyPr>
-          <a:lstStyle/>
-          <a:p>
-            <a:pPr algn="l">
-              <a:lnSpc>
-                <a:spcPts val="1015"/>
-              </a:lnSpc>
-            </a:pPr>
-            <a:r>
-              <a:rPr sz="700" b="1">
-                <a:solidFill>
-                  <a:srgbClr val="327B65"/>
-                </a:solidFill>
-                <a:latin typeface="맑은 고딕"/>
-                <a:ea typeface="맑은 고딕"/>
-              </a:rPr>
-              <a:t>E</a:t>
-            </a:r>
-          </a:p>
-        </p:txBody>
-      </p:sp>
-      <p:sp>
-        <p:nvSpPr>
-          <p:cNvPr id="12" name="텍스트"/>
-          <p:cNvSpPr txBox="1"/>
-          <p:nvPr/>
-        </p:nvSpPr>
-        <p:spPr>
-          <a:xfrm>
-            <a:off x="1476000" y="1220111"/>
-            <a:ext cx="1584000" cy="168911"/>
-          </a:xfrm>
-          <a:prstGeom prst="rect">
-            <a:avLst/>
-          </a:prstGeom>
-          <a:noFill/>
-        </p:spPr>
-        <p:txBody>
-          <a:bodyPr wrap="square" lIns="0" rIns="0" tIns="0" bIns="0" anchor="t">
-            <a:spAutoFit/>
-          </a:bodyPr>
-          <a:lstStyle/>
-          <a:p>
-            <a:pPr algn="l">
-              <a:lnSpc>
-                <a:spcPts val="1015"/>
-              </a:lnSpc>
-            </a:pPr>
-            <a:r>
-              <a:rPr sz="700" b="0">
-                <a:solidFill>
-                  <a:srgbClr val="5B2315"/>
-                </a:solidFill>
-                <a:latin typeface="맑은 고딕"/>
-                <a:ea typeface="맑은 고딕"/>
-              </a:rPr>
-              <a:t>name@example.com</a:t>
-            </a:r>
-          </a:p>
-        </p:txBody>
-      </p:sp>
-      <p:sp>
-        <p:nvSpPr>
-          <p:cNvPr id="13" name="텍스트"/>
-          <p:cNvSpPr txBox="1"/>
-          <p:nvPr/>
-        </p:nvSpPr>
-        <p:spPr>
-          <a:xfrm>
-            <a:off x="1332000" y="1389022"/>
-            <a:ext cx="122400" cy="168911"/>
-          </a:xfrm>
-          <a:prstGeom prst="rect">
-            <a:avLst/>
-          </a:prstGeom>
-          <a:noFill/>
-        </p:spPr>
-        <p:txBody>
-          <a:bodyPr wrap="square" lIns="0" rIns="0" tIns="0" bIns="0" anchor="t">
-            <a:spAutoFit/>
-          </a:bodyPr>
-          <a:lstStyle/>
-          <a:p>
-            <a:pPr algn="l">
-              <a:lnSpc>
-                <a:spcPts val="1015"/>
-              </a:lnSpc>
-            </a:pPr>
-            <a:r>
-              <a:rPr sz="700" b="1">
-                <a:solidFill>
-                  <a:srgbClr val="327B65"/>
-                </a:solidFill>
-                <a:latin typeface="맑은 고딕"/>
-                <a:ea typeface="맑은 고딕"/>
-              </a:rPr>
-              <a:t>A</a:t>
-            </a:r>
-          </a:p>
-        </p:txBody>
-      </p:sp>
-      <p:sp>
-        <p:nvSpPr>
-          <p:cNvPr id="14" name="텍스트"/>
-          <p:cNvSpPr txBox="1"/>
-          <p:nvPr/>
-        </p:nvSpPr>
-        <p:spPr>
-          <a:xfrm>
-            <a:off x="1476000" y="1389022"/>
-            <a:ext cx="1584000" cy="168911"/>
-          </a:xfrm>
-          <a:prstGeom prst="rect">
-            <a:avLst/>
-          </a:prstGeom>
-          <a:noFill/>
-        </p:spPr>
-        <p:txBody>
-          <a:bodyPr wrap="square" lIns="0" rIns="0" tIns="0" bIns="0" anchor="t">
-            <a:spAutoFit/>
-          </a:bodyPr>
-          <a:lstStyle/>
-          <a:p>
-            <a:pPr algn="l">
-              <a:lnSpc>
-                <a:spcPts val="1015"/>
-              </a:lnSpc>
-            </a:pPr>
-            <a:r>
-              <a:rPr sz="700" b="0">
-                <a:solidFill>
-                  <a:srgbClr val="5B2315"/>
-                </a:solidFill>
-                <a:latin typeface="맑은 고딕"/>
-                <a:ea typeface="맑은 고딕"/>
-              </a:rPr>
-              <a:t>주소를 입력해 주세요</a:t>
+              <a:t>상호명</a:t>
             </a:r>
           </a:p>
         </p:txBody>
@@ -3598,7 +3369,7 @@
     <p:bg>
       <p:bgPr>
         <a:solidFill>
-          <a:srgbClr val="5B2315"/>
+          <a:srgbClr val="0A2F7A"/>
         </a:solidFill>
         <a:effectLst/>
       </p:bgPr>
@@ -3618,14 +3389,14 @@
         </p:nvSpPr>
         <p:spPr>
           <a:xfrm>
-            <a:off x="0" y="0"/>
-            <a:ext cx="273600" cy="1800000"/>
+            <a:off x="2088000" y="0"/>
+            <a:ext cx="1152000" cy="1800000"/>
           </a:xfrm>
           <a:prstGeom prst="rect">
             <a:avLst/>
           </a:prstGeom>
           <a:solidFill>
-            <a:srgbClr val="C57865"/>
+            <a:srgbClr val="3B5995"/>
           </a:solidFill>
           <a:ln>
             <a:noFill/>
@@ -3639,66 +3410,45 @@
           </a:p>
         </p:txBody>
       </p:sp>
-      <p:cxnSp>
-        <p:nvCxnSpPr>
-          <p:cNvPr id="3" name="Connector 2"/>
-          <p:cNvCxnSpPr/>
+      <p:sp>
+        <p:nvSpPr>
+          <p:cNvPr id="3" name="Oval 2"/>
+          <p:cNvSpPr/>
           <p:nvPr/>
-        </p:nvCxnSpPr>
+        </p:nvSpPr>
         <p:spPr>
-          <a:xfrm flipV="1">
-            <a:off x="89280" y="218592"/>
-            <a:ext cx="69696" cy="69696"/>
+          <a:xfrm>
+            <a:off x="2397600" y="633600"/>
+            <a:ext cx="532800" cy="532800"/>
           </a:xfrm>
-          <a:prstGeom prst="line">
+          <a:prstGeom prst="ellipse">
             <a:avLst/>
           </a:prstGeom>
-          <a:ln w="23760">
+          <a:noFill/>
+          <a:ln w="10800">
             <a:solidFill>
               <a:srgbClr val="FFFFFF"/>
             </a:solidFill>
           </a:ln>
         </p:spPr>
-      </p:cxnSp>
-      <p:sp>
-        <p:nvSpPr>
-          <p:cNvPr id="4" name="Oval 3"/>
-          <p:cNvSpPr/>
+        <p:txBody>
+          <a:bodyPr rtlCol="0" anchor="ctr"/>
+          <a:lstStyle/>
+          <a:p>
+            <a:pPr algn="ctr"/>
+          </a:p>
+        </p:txBody>
+      </p:sp>
+      <p:sp>
+        <p:nvSpPr>
+          <p:cNvPr id="4" name="텍스트"/>
+          <p:cNvSpPr txBox="1"/>
           <p:nvPr/>
         </p:nvSpPr>
         <p:spPr>
           <a:xfrm>
-            <a:off x="139968" y="171072"/>
-            <a:ext cx="63360" cy="63360"/>
-          </a:xfrm>
-          <a:prstGeom prst="ellipse">
-            <a:avLst/>
-          </a:prstGeom>
-          <a:solidFill>
-            <a:srgbClr val="FFFFFF"/>
-          </a:solidFill>
-          <a:ln>
-            <a:noFill/>
-          </a:ln>
-        </p:spPr>
-        <p:txBody>
-          <a:bodyPr rtlCol="0" anchor="ctr"/>
-          <a:lstStyle/>
-          <a:p>
-            <a:pPr algn="ctr"/>
-          </a:p>
-        </p:txBody>
-      </p:sp>
-      <p:sp>
-        <p:nvSpPr>
-          <p:cNvPr id="5" name="텍스트"/>
-          <p:cNvSpPr txBox="1"/>
-          <p:nvPr/>
-        </p:nvSpPr>
-        <p:spPr>
-          <a:xfrm>
-            <a:off x="504000" y="396000"/>
-            <a:ext cx="1800000" cy="720000"/>
+            <a:off x="2304000" y="684000"/>
+            <a:ext cx="720000" cy="432000"/>
           </a:xfrm>
           <a:prstGeom prst="rect">
             <a:avLst/>
@@ -3711,34 +3461,34 @@
           </a:bodyPr>
           <a:lstStyle/>
           <a:p>
-            <a:pPr algn="l">
+            <a:pPr algn="ctr">
               <a:lnSpc>
-                <a:spcPts val="1667"/>
+                <a:spcPts val="4350"/>
               </a:lnSpc>
             </a:pPr>
             <a:r>
-              <a:rPr sz="1150" b="1">
+              <a:rPr sz="3000" b="1">
                 <a:solidFill>
                   <a:srgbClr val="FFFFFF"/>
                 </a:solidFill>
                 <a:latin typeface="맑은 고딕"/>
                 <a:ea typeface="맑은 고딕"/>
               </a:rPr>
-              <a:t>작은 수리에도 큰 책임을</a:t>
-            </a:r>
-          </a:p>
-        </p:txBody>
-      </p:sp>
-      <p:sp>
-        <p:nvSpPr>
-          <p:cNvPr id="6" name="텍스트"/>
+              <a:t>상</a:t>
+            </a:r>
+          </a:p>
+        </p:txBody>
+      </p:sp>
+      <p:sp>
+        <p:nvSpPr>
+          <p:cNvPr id="5" name="텍스트"/>
           <p:cNvSpPr txBox="1"/>
           <p:nvPr/>
         </p:nvSpPr>
         <p:spPr>
           <a:xfrm>
-            <a:off x="504000" y="1260000"/>
-            <a:ext cx="1728000" cy="108000"/>
+            <a:off x="252000" y="540000"/>
+            <a:ext cx="1620000" cy="720000"/>
           </a:xfrm>
           <a:prstGeom prst="rect">
             <a:avLst/>
@@ -3753,62 +3503,49 @@
           <a:p>
             <a:pPr algn="l">
               <a:lnSpc>
-                <a:spcPts val="1087"/>
+                <a:spcPts val="1739"/>
               </a:lnSpc>
             </a:pPr>
             <a:r>
-              <a:rPr sz="750" b="1" spc="200">
+              <a:rPr sz="1200" b="1">
                 <a:solidFill>
-                  <a:srgbClr val="C6B2AD"/>
+                  <a:srgbClr val="FFFFFF"/>
                 </a:solidFill>
                 <a:latin typeface="맑은 고딕"/>
                 <a:ea typeface="맑은 고딕"/>
               </a:rPr>
-              <a:t>상호명</a:t>
-            </a:r>
-          </a:p>
-        </p:txBody>
-      </p:sp>
-      <p:sp>
-        <p:nvSpPr>
-          <p:cNvPr id="7" name="Rectangle 6"/>
-          <p:cNvSpPr/>
+              <a:t>작은 수리에도</a:t>
+            </a:r>
+          </a:p>
+          <a:p>
+            <a:pPr algn="l">
+              <a:lnSpc>
+                <a:spcPts val="1739"/>
+              </a:lnSpc>
+            </a:pPr>
+            <a:r>
+              <a:rPr sz="1200" b="1">
+                <a:solidFill>
+                  <a:srgbClr val="FFFFFF"/>
+                </a:solidFill>
+                <a:latin typeface="맑은 고딕"/>
+                <a:ea typeface="맑은 고딕"/>
+              </a:rPr>
+              <a:t>큰 책임을</a:t>
+            </a:r>
+          </a:p>
+        </p:txBody>
+      </p:sp>
+      <p:sp>
+        <p:nvSpPr>
+          <p:cNvPr id="6" name="텍스트"/>
+          <p:cNvSpPr txBox="1"/>
           <p:nvPr/>
         </p:nvSpPr>
         <p:spPr>
           <a:xfrm>
-            <a:off x="2520000" y="216000"/>
-            <a:ext cx="468000" cy="468000"/>
-          </a:xfrm>
-          <a:prstGeom prst="rect">
-            <a:avLst/>
-          </a:prstGeom>
-          <a:noFill/>
-          <a:ln w="9000">
-            <a:solidFill>
-              <a:srgbClr val="C57865"/>
-            </a:solidFill>
-            <a:prstDash val="dash"/>
-          </a:ln>
-        </p:spPr>
-        <p:txBody>
-          <a:bodyPr rtlCol="0" anchor="ctr"/>
-          <a:lstStyle/>
-          <a:p>
-            <a:pPr algn="ctr"/>
-          </a:p>
-        </p:txBody>
-      </p:sp>
-      <p:sp>
-        <p:nvSpPr>
-          <p:cNvPr id="8" name="텍스트"/>
-          <p:cNvSpPr txBox="1"/>
-          <p:nvPr/>
-        </p:nvSpPr>
-        <p:spPr>
-          <a:xfrm>
-            <a:off x="2520000" y="216000"/>
-            <a:ext cx="468000" cy="468000"/>
+            <a:off x="252000" y="1512000"/>
+            <a:ext cx="1584000" cy="123826"/>
           </a:xfrm>
           <a:prstGeom prst="rect">
             <a:avLst/>
@@ -3816,25 +3553,25 @@
           <a:noFill/>
         </p:spPr>
         <p:txBody>
-          <a:bodyPr wrap="square" lIns="0" rIns="0" tIns="0" bIns="0" anchor="ctr">
+          <a:bodyPr wrap="square" lIns="0" rIns="0" tIns="0" bIns="0" anchor="t">
             <a:spAutoFit/>
           </a:bodyPr>
           <a:lstStyle/>
           <a:p>
-            <a:pPr algn="ctr">
+            <a:pPr algn="l">
               <a:lnSpc>
-                <a:spcPts val="1305"/>
+                <a:spcPts val="942"/>
               </a:lnSpc>
             </a:pPr>
             <a:r>
-              <a:rPr sz="900" b="1">
+              <a:rPr sz="650" b="1" spc="200">
                 <a:solidFill>
-                  <a:srgbClr val="C6B2AD"/>
+                  <a:srgbClr val="C9D1E2"/>
                 </a:solidFill>
                 <a:latin typeface="맑은 고딕"/>
                 <a:ea typeface="맑은 고딕"/>
               </a:rPr>
-              <a:t>QR</a:t>
+              <a:t>상호명</a:t>
             </a:r>
           </a:p>
         </p:txBody>

--- a/public/fun/cards/life/life-15.pptx
+++ b/public/fun/cards/life/life-15.pptx
@@ -3097,25 +3097,193 @@
         <p:nvPr/>
       </p:nvGrpSpPr>
       <p:grpSpPr/>
-      <p:sp>
-        <p:nvSpPr>
-          <p:cNvPr id="2" name="Oval 1"/>
+      <p:cxnSp>
+        <p:nvCxnSpPr>
+          <p:cNvPr id="2" name="Connector 1"/>
+          <p:cNvCxnSpPr/>
+          <p:nvPr/>
+        </p:nvCxnSpPr>
+        <p:spPr>
+          <a:xfrm>
+            <a:off x="93600" y="122400"/>
+            <a:ext cx="57600" cy="0"/>
+          </a:xfrm>
+          <a:prstGeom prst="line">
+            <a:avLst/>
+          </a:prstGeom>
+          <a:ln w="3600">
+            <a:solidFill>
+              <a:srgbClr val="BAC5DA"/>
+            </a:solidFill>
+          </a:ln>
+        </p:spPr>
+      </p:cxnSp>
+      <p:cxnSp>
+        <p:nvCxnSpPr>
+          <p:cNvPr id="3" name="Connector 2"/>
+          <p:cNvCxnSpPr/>
+          <p:nvPr/>
+        </p:nvCxnSpPr>
+        <p:spPr>
+          <a:xfrm>
+            <a:off x="122400" y="93600"/>
+            <a:ext cx="0" cy="57600"/>
+          </a:xfrm>
+          <a:prstGeom prst="line">
+            <a:avLst/>
+          </a:prstGeom>
+          <a:ln w="3600">
+            <a:solidFill>
+              <a:srgbClr val="BAC5DA"/>
+            </a:solidFill>
+          </a:ln>
+        </p:spPr>
+      </p:cxnSp>
+      <p:cxnSp>
+        <p:nvCxnSpPr>
+          <p:cNvPr id="4" name="Connector 3"/>
+          <p:cNvCxnSpPr/>
+          <p:nvPr/>
+        </p:nvCxnSpPr>
+        <p:spPr>
+          <a:xfrm>
+            <a:off x="3088800" y="122400"/>
+            <a:ext cx="57600" cy="0"/>
+          </a:xfrm>
+          <a:prstGeom prst="line">
+            <a:avLst/>
+          </a:prstGeom>
+          <a:ln w="3600">
+            <a:solidFill>
+              <a:srgbClr val="BAC5DA"/>
+            </a:solidFill>
+          </a:ln>
+        </p:spPr>
+      </p:cxnSp>
+      <p:cxnSp>
+        <p:nvCxnSpPr>
+          <p:cNvPr id="5" name="Connector 4"/>
+          <p:cNvCxnSpPr/>
+          <p:nvPr/>
+        </p:nvCxnSpPr>
+        <p:spPr>
+          <a:xfrm>
+            <a:off x="3117600" y="93600"/>
+            <a:ext cx="0" cy="57600"/>
+          </a:xfrm>
+          <a:prstGeom prst="line">
+            <a:avLst/>
+          </a:prstGeom>
+          <a:ln w="3600">
+            <a:solidFill>
+              <a:srgbClr val="BAC5DA"/>
+            </a:solidFill>
+          </a:ln>
+        </p:spPr>
+      </p:cxnSp>
+      <p:cxnSp>
+        <p:nvCxnSpPr>
+          <p:cNvPr id="6" name="Connector 5"/>
+          <p:cNvCxnSpPr/>
+          <p:nvPr/>
+        </p:nvCxnSpPr>
+        <p:spPr>
+          <a:xfrm>
+            <a:off x="93600" y="1677600"/>
+            <a:ext cx="57600" cy="0"/>
+          </a:xfrm>
+          <a:prstGeom prst="line">
+            <a:avLst/>
+          </a:prstGeom>
+          <a:ln w="3600">
+            <a:solidFill>
+              <a:srgbClr val="BAC5DA"/>
+            </a:solidFill>
+          </a:ln>
+        </p:spPr>
+      </p:cxnSp>
+      <p:cxnSp>
+        <p:nvCxnSpPr>
+          <p:cNvPr id="7" name="Connector 6"/>
+          <p:cNvCxnSpPr/>
+          <p:nvPr/>
+        </p:nvCxnSpPr>
+        <p:spPr>
+          <a:xfrm>
+            <a:off x="122400" y="1648800"/>
+            <a:ext cx="0" cy="57600"/>
+          </a:xfrm>
+          <a:prstGeom prst="line">
+            <a:avLst/>
+          </a:prstGeom>
+          <a:ln w="3600">
+            <a:solidFill>
+              <a:srgbClr val="BAC5DA"/>
+            </a:solidFill>
+          </a:ln>
+        </p:spPr>
+      </p:cxnSp>
+      <p:cxnSp>
+        <p:nvCxnSpPr>
+          <p:cNvPr id="8" name="Connector 7"/>
+          <p:cNvCxnSpPr/>
+          <p:nvPr/>
+        </p:nvCxnSpPr>
+        <p:spPr>
+          <a:xfrm>
+            <a:off x="3088800" y="1677600"/>
+            <a:ext cx="57600" cy="0"/>
+          </a:xfrm>
+          <a:prstGeom prst="line">
+            <a:avLst/>
+          </a:prstGeom>
+          <a:ln w="3600">
+            <a:solidFill>
+              <a:srgbClr val="BAC5DA"/>
+            </a:solidFill>
+          </a:ln>
+        </p:spPr>
+      </p:cxnSp>
+      <p:cxnSp>
+        <p:nvCxnSpPr>
+          <p:cNvPr id="9" name="Connector 8"/>
+          <p:cNvCxnSpPr/>
+          <p:nvPr/>
+        </p:nvCxnSpPr>
+        <p:spPr>
+          <a:xfrm>
+            <a:off x="3117600" y="1648800"/>
+            <a:ext cx="0" cy="57600"/>
+          </a:xfrm>
+          <a:prstGeom prst="line">
+            <a:avLst/>
+          </a:prstGeom>
+          <a:ln w="3600">
+            <a:solidFill>
+              <a:srgbClr val="BAC5DA"/>
+            </a:solidFill>
+          </a:ln>
+        </p:spPr>
+      </p:cxnSp>
+      <p:sp>
+        <p:nvSpPr>
+          <p:cNvPr id="10" name="Oval 9"/>
           <p:cNvSpPr/>
           <p:nvPr/>
         </p:nvSpPr>
         <p:spPr>
           <a:xfrm>
-            <a:off x="1591200" y="208800"/>
-            <a:ext cx="57600" cy="57600"/>
+            <a:off x="1526400" y="237600"/>
+            <a:ext cx="187200" cy="187200"/>
           </a:xfrm>
           <a:prstGeom prst="ellipse">
             <a:avLst/>
           </a:prstGeom>
-          <a:solidFill>
-            <a:srgbClr val="0A2F7A"/>
-          </a:solidFill>
-          <a:ln>
-            <a:noFill/>
+          <a:noFill/>
+          <a:ln w="5040">
+            <a:solidFill>
+              <a:srgbClr val="0A2F7A"/>
+            </a:solidFill>
           </a:ln>
         </p:spPr>
         <p:txBody>
@@ -3128,14 +3296,54 @@
       </p:sp>
       <p:sp>
         <p:nvSpPr>
-          <p:cNvPr id="3" name="텍스트"/>
+          <p:cNvPr id="11" name="텍스트"/>
           <p:cNvSpPr txBox="1"/>
           <p:nvPr/>
         </p:nvSpPr>
         <p:spPr>
           <a:xfrm>
-            <a:off x="360000" y="468000"/>
-            <a:ext cx="2520000" cy="360000"/>
+            <a:off x="1476000" y="237600"/>
+            <a:ext cx="288000" cy="187200"/>
+          </a:xfrm>
+          <a:prstGeom prst="rect">
+            <a:avLst/>
+          </a:prstGeom>
+          <a:noFill/>
+        </p:spPr>
+        <p:txBody>
+          <a:bodyPr wrap="square" lIns="0" rIns="0" tIns="0" bIns="0" anchor="ctr">
+            <a:spAutoFit/>
+          </a:bodyPr>
+          <a:lstStyle/>
+          <a:p>
+            <a:pPr algn="ctr">
+              <a:lnSpc>
+                <a:spcPts val="1305"/>
+              </a:lnSpc>
+            </a:pPr>
+            <a:r>
+              <a:rPr sz="900" b="1">
+                <a:solidFill>
+                  <a:srgbClr val="0A2F7A"/>
+                </a:solidFill>
+                <a:latin typeface="맑은 고딕"/>
+                <a:ea typeface="맑은 고딕"/>
+              </a:rPr>
+              <a:t>상</a:t>
+            </a:r>
+          </a:p>
+        </p:txBody>
+      </p:sp>
+      <p:sp>
+        <p:nvSpPr>
+          <p:cNvPr id="12" name="텍스트"/>
+          <p:cNvSpPr txBox="1"/>
+          <p:nvPr/>
+        </p:nvSpPr>
+        <p:spPr>
+          <a:xfrm>
+            <a:off x="360000" y="540000"/>
+            <a:ext cx="2520000" cy="237600"/>
           </a:xfrm>
           <a:prstGeom prst="rect">
             <a:avLst/>
@@ -3150,11 +3358,11 @@
           <a:p>
             <a:pPr algn="ctr">
               <a:lnSpc>
-                <a:spcPts val="3190"/>
+                <a:spcPts val="1957"/>
               </a:lnSpc>
             </a:pPr>
             <a:r>
-              <a:rPr sz="2200" b="1">
+              <a:rPr sz="1350" b="1" spc="120">
                 <a:solidFill>
                   <a:srgbClr val="12151C"/>
                 </a:solidFill>
@@ -3168,14 +3376,14 @@
       </p:sp>
       <p:sp>
         <p:nvSpPr>
-          <p:cNvPr id="4" name="텍스트"/>
+          <p:cNvPr id="13" name="텍스트"/>
           <p:cNvSpPr txBox="1"/>
           <p:nvPr/>
         </p:nvSpPr>
         <p:spPr>
           <a:xfrm>
-            <a:off x="360000" y="878400"/>
-            <a:ext cx="2520000" cy="171451"/>
+            <a:off x="360000" y="792000"/>
+            <a:ext cx="2520000" cy="133351"/>
           </a:xfrm>
           <a:prstGeom prst="rect">
             <a:avLst/>
@@ -3190,11 +3398,11 @@
           <a:p>
             <a:pPr algn="ctr">
               <a:lnSpc>
-                <a:spcPts val="1305"/>
+                <a:spcPts val="1015"/>
               </a:lnSpc>
             </a:pPr>
             <a:r>
-              <a:rPr sz="900" b="0">
+              <a:rPr sz="700" b="0" spc="60">
                 <a:solidFill>
                   <a:srgbClr val="0F1F40"/>
                 </a:solidFill>
@@ -3206,45 +3414,37 @@
           </a:p>
         </p:txBody>
       </p:sp>
-      <p:sp>
-        <p:nvSpPr>
-          <p:cNvPr id="5" name="Rectangle 4"/>
-          <p:cNvSpPr/>
-          <p:nvPr/>
-        </p:nvSpPr>
-        <p:spPr>
-          <a:xfrm>
-            <a:off x="1530000" y="1137600"/>
-            <a:ext cx="180000" cy="14400"/>
-          </a:xfrm>
-          <a:prstGeom prst="rect">
-            <a:avLst/>
-          </a:prstGeom>
-          <a:solidFill>
-            <a:srgbClr val="0A2F7A"/>
-          </a:solidFill>
-          <a:ln>
-            <a:noFill/>
+      <p:cxnSp>
+        <p:nvCxnSpPr>
+          <p:cNvPr id="14" name="Connector 13"/>
+          <p:cNvCxnSpPr/>
+          <p:nvPr/>
+        </p:nvCxnSpPr>
+        <p:spPr>
+          <a:xfrm>
+            <a:off x="1440000" y="1015200"/>
+            <a:ext cx="360000" cy="0"/>
+          </a:xfrm>
+          <a:prstGeom prst="line">
+            <a:avLst/>
+          </a:prstGeom>
+          <a:ln w="7920">
+            <a:solidFill>
+              <a:srgbClr val="0A2F7A"/>
+            </a:solidFill>
           </a:ln>
         </p:spPr>
-        <p:txBody>
-          <a:bodyPr rtlCol="0" anchor="ctr"/>
-          <a:lstStyle/>
-          <a:p>
-            <a:pPr algn="ctr"/>
-          </a:p>
-        </p:txBody>
-      </p:sp>
-      <p:sp>
-        <p:nvSpPr>
-          <p:cNvPr id="6" name="텍스트"/>
+      </p:cxnSp>
+      <p:sp>
+        <p:nvSpPr>
+          <p:cNvPr id="15" name="텍스트"/>
           <p:cNvSpPr txBox="1"/>
           <p:nvPr/>
         </p:nvSpPr>
         <p:spPr>
           <a:xfrm>
-            <a:off x="360000" y="1267200"/>
-            <a:ext cx="2520000" cy="133351"/>
+            <a:off x="360000" y="1101600"/>
+            <a:ext cx="2520000" cy="123826"/>
           </a:xfrm>
           <a:prstGeom prst="rect">
             <a:avLst/>
@@ -3259,32 +3459,72 @@
           <a:p>
             <a:pPr algn="ctr">
               <a:lnSpc>
-                <a:spcPts val="1015"/>
+                <a:spcPts val="942"/>
               </a:lnSpc>
             </a:pPr>
             <a:r>
-              <a:rPr sz="700" b="0">
+              <a:rPr sz="650" b="1" spc="220">
+                <a:solidFill>
+                  <a:srgbClr val="0F1F40"/>
+                </a:solidFill>
+                <a:latin typeface="맑은 고딕"/>
+                <a:ea typeface="맑은 고딕"/>
+              </a:rPr>
+              <a:t>상호명</a:t>
+            </a:r>
+          </a:p>
+        </p:txBody>
+      </p:sp>
+      <p:sp>
+        <p:nvSpPr>
+          <p:cNvPr id="16" name="텍스트"/>
+          <p:cNvSpPr txBox="1"/>
+          <p:nvPr/>
+        </p:nvSpPr>
+        <p:spPr>
+          <a:xfrm>
+            <a:off x="360000" y="1339200"/>
+            <a:ext cx="2520000" cy="123826"/>
+          </a:xfrm>
+          <a:prstGeom prst="rect">
+            <a:avLst/>
+          </a:prstGeom>
+          <a:noFill/>
+        </p:spPr>
+        <p:txBody>
+          <a:bodyPr wrap="square" lIns="0" rIns="0" tIns="0" bIns="0" anchor="t">
+            <a:spAutoFit/>
+          </a:bodyPr>
+          <a:lstStyle/>
+          <a:p>
+            <a:pPr algn="ctr">
+              <a:lnSpc>
+                <a:spcPts val="942"/>
+              </a:lnSpc>
+            </a:pPr>
+            <a:r>
+              <a:rPr sz="650" b="0">
                 <a:solidFill>
                   <a:srgbClr val="12151C"/>
                 </a:solidFill>
                 <a:latin typeface="맑은 고딕"/>
                 <a:ea typeface="맑은 고딕"/>
               </a:rPr>
-              <a:t>010-1234-5678      name@example.com</a:t>
-            </a:r>
-          </a:p>
-        </p:txBody>
-      </p:sp>
-      <p:sp>
-        <p:nvSpPr>
-          <p:cNvPr id="7" name="텍스트"/>
+              <a:t>010-1234-5678     |     name@example.com</a:t>
+            </a:r>
+          </a:p>
+        </p:txBody>
+      </p:sp>
+      <p:sp>
+        <p:nvSpPr>
+          <p:cNvPr id="17" name="텍스트"/>
           <p:cNvSpPr txBox="1"/>
           <p:nvPr/>
         </p:nvSpPr>
         <p:spPr>
           <a:xfrm>
-            <a:off x="360000" y="1425600"/>
-            <a:ext cx="2520000" cy="133351"/>
+            <a:off x="360000" y="1476000"/>
+            <a:ext cx="2520000" cy="123826"/>
           </a:xfrm>
           <a:prstGeom prst="rect">
             <a:avLst/>
@@ -3299,11 +3539,11 @@
           <a:p>
             <a:pPr algn="ctr">
               <a:lnSpc>
-                <a:spcPts val="1015"/>
+                <a:spcPts val="942"/>
               </a:lnSpc>
             </a:pPr>
             <a:r>
-              <a:rPr sz="700" b="0">
+              <a:rPr sz="650" b="0">
                 <a:solidFill>
                   <a:srgbClr val="0F1F40"/>
                 </a:solidFill>
@@ -3311,46 +3551,6 @@
                 <a:ea typeface="맑은 고딕"/>
               </a:rPr>
               <a:t>주소를 입력해 주세요</a:t>
-            </a:r>
-          </a:p>
-        </p:txBody>
-      </p:sp>
-      <p:sp>
-        <p:nvSpPr>
-          <p:cNvPr id="8" name="텍스트"/>
-          <p:cNvSpPr txBox="1"/>
-          <p:nvPr/>
-        </p:nvSpPr>
-        <p:spPr>
-          <a:xfrm>
-            <a:off x="360000" y="1576800"/>
-            <a:ext cx="2520000" cy="104776"/>
-          </a:xfrm>
-          <a:prstGeom prst="rect">
-            <a:avLst/>
-          </a:prstGeom>
-          <a:noFill/>
-        </p:spPr>
-        <p:txBody>
-          <a:bodyPr wrap="square" lIns="0" rIns="0" tIns="0" bIns="0" anchor="t">
-            <a:spAutoFit/>
-          </a:bodyPr>
-          <a:lstStyle/>
-          <a:p>
-            <a:pPr algn="ctr">
-              <a:lnSpc>
-                <a:spcPts val="797"/>
-              </a:lnSpc>
-            </a:pPr>
-            <a:r>
-              <a:rPr sz="550" b="1" spc="300">
-                <a:solidFill>
-                  <a:srgbClr val="0F1F40"/>
-                </a:solidFill>
-                <a:latin typeface="맑은 고딕"/>
-                <a:ea typeface="맑은 고딕"/>
-              </a:rPr>
-              <a:t>상호명</a:t>
             </a:r>
           </a:p>
         </p:txBody>
@@ -3389,8 +3589,8 @@
         </p:nvSpPr>
         <p:spPr>
           <a:xfrm>
-            <a:off x="2088000" y="0"/>
-            <a:ext cx="1152000" cy="1800000"/>
+            <a:off x="0" y="0"/>
+            <a:ext cx="1188000" cy="1800000"/>
           </a:xfrm>
           <a:prstGeom prst="rect">
             <a:avLst/>
@@ -3410,22 +3610,652 @@
           </a:p>
         </p:txBody>
       </p:sp>
-      <p:sp>
-        <p:nvSpPr>
-          <p:cNvPr id="3" name="Oval 2"/>
+      <p:cxnSp>
+        <p:nvCxnSpPr>
+          <p:cNvPr id="3" name="Connector 2"/>
+          <p:cNvCxnSpPr/>
+          <p:nvPr/>
+        </p:nvCxnSpPr>
+        <p:spPr>
+          <a:xfrm flipV="1">
+            <a:off x="0" y="1224000"/>
+            <a:ext cx="57600" cy="57600"/>
+          </a:xfrm>
+          <a:prstGeom prst="line">
+            <a:avLst/>
+          </a:prstGeom>
+          <a:ln w="3600">
+            <a:solidFill>
+              <a:srgbClr val="C9D1E2"/>
+            </a:solidFill>
+          </a:ln>
+        </p:spPr>
+      </p:cxnSp>
+      <p:cxnSp>
+        <p:nvCxnSpPr>
+          <p:cNvPr id="4" name="Connector 3"/>
+          <p:cNvCxnSpPr/>
+          <p:nvPr/>
+        </p:nvCxnSpPr>
+        <p:spPr>
+          <a:xfrm flipV="1">
+            <a:off x="0" y="1224000"/>
+            <a:ext cx="115200" cy="115200"/>
+          </a:xfrm>
+          <a:prstGeom prst="line">
+            <a:avLst/>
+          </a:prstGeom>
+          <a:ln w="3600">
+            <a:solidFill>
+              <a:srgbClr val="C9D1E2"/>
+            </a:solidFill>
+          </a:ln>
+        </p:spPr>
+      </p:cxnSp>
+      <p:cxnSp>
+        <p:nvCxnSpPr>
+          <p:cNvPr id="5" name="Connector 4"/>
+          <p:cNvCxnSpPr/>
+          <p:nvPr/>
+        </p:nvCxnSpPr>
+        <p:spPr>
+          <a:xfrm flipV="1">
+            <a:off x="0" y="1224000"/>
+            <a:ext cx="172800" cy="172800"/>
+          </a:xfrm>
+          <a:prstGeom prst="line">
+            <a:avLst/>
+          </a:prstGeom>
+          <a:ln w="3600">
+            <a:solidFill>
+              <a:srgbClr val="C9D1E2"/>
+            </a:solidFill>
+          </a:ln>
+        </p:spPr>
+      </p:cxnSp>
+      <p:cxnSp>
+        <p:nvCxnSpPr>
+          <p:cNvPr id="6" name="Connector 5"/>
+          <p:cNvCxnSpPr/>
+          <p:nvPr/>
+        </p:nvCxnSpPr>
+        <p:spPr>
+          <a:xfrm flipV="1">
+            <a:off x="0" y="1224000"/>
+            <a:ext cx="230400" cy="230400"/>
+          </a:xfrm>
+          <a:prstGeom prst="line">
+            <a:avLst/>
+          </a:prstGeom>
+          <a:ln w="3600">
+            <a:solidFill>
+              <a:srgbClr val="C9D1E2"/>
+            </a:solidFill>
+          </a:ln>
+        </p:spPr>
+      </p:cxnSp>
+      <p:cxnSp>
+        <p:nvCxnSpPr>
+          <p:cNvPr id="7" name="Connector 6"/>
+          <p:cNvCxnSpPr/>
+          <p:nvPr/>
+        </p:nvCxnSpPr>
+        <p:spPr>
+          <a:xfrm flipV="1">
+            <a:off x="0" y="1224000"/>
+            <a:ext cx="288000" cy="288000"/>
+          </a:xfrm>
+          <a:prstGeom prst="line">
+            <a:avLst/>
+          </a:prstGeom>
+          <a:ln w="3600">
+            <a:solidFill>
+              <a:srgbClr val="C9D1E2"/>
+            </a:solidFill>
+          </a:ln>
+        </p:spPr>
+      </p:cxnSp>
+      <p:cxnSp>
+        <p:nvCxnSpPr>
+          <p:cNvPr id="8" name="Connector 7"/>
+          <p:cNvCxnSpPr/>
+          <p:nvPr/>
+        </p:nvCxnSpPr>
+        <p:spPr>
+          <a:xfrm flipV="1">
+            <a:off x="0" y="1224000"/>
+            <a:ext cx="345600" cy="345600"/>
+          </a:xfrm>
+          <a:prstGeom prst="line">
+            <a:avLst/>
+          </a:prstGeom>
+          <a:ln w="3600">
+            <a:solidFill>
+              <a:srgbClr val="C9D1E2"/>
+            </a:solidFill>
+          </a:ln>
+        </p:spPr>
+      </p:cxnSp>
+      <p:cxnSp>
+        <p:nvCxnSpPr>
+          <p:cNvPr id="9" name="Connector 8"/>
+          <p:cNvCxnSpPr/>
+          <p:nvPr/>
+        </p:nvCxnSpPr>
+        <p:spPr>
+          <a:xfrm flipV="1">
+            <a:off x="0" y="1224000"/>
+            <a:ext cx="403200" cy="403200"/>
+          </a:xfrm>
+          <a:prstGeom prst="line">
+            <a:avLst/>
+          </a:prstGeom>
+          <a:ln w="3600">
+            <a:solidFill>
+              <a:srgbClr val="C9D1E2"/>
+            </a:solidFill>
+          </a:ln>
+        </p:spPr>
+      </p:cxnSp>
+      <p:cxnSp>
+        <p:nvCxnSpPr>
+          <p:cNvPr id="10" name="Connector 9"/>
+          <p:cNvCxnSpPr/>
+          <p:nvPr/>
+        </p:nvCxnSpPr>
+        <p:spPr>
+          <a:xfrm flipV="1">
+            <a:off x="0" y="1224000"/>
+            <a:ext cx="460800" cy="460800"/>
+          </a:xfrm>
+          <a:prstGeom prst="line">
+            <a:avLst/>
+          </a:prstGeom>
+          <a:ln w="3600">
+            <a:solidFill>
+              <a:srgbClr val="C9D1E2"/>
+            </a:solidFill>
+          </a:ln>
+        </p:spPr>
+      </p:cxnSp>
+      <p:cxnSp>
+        <p:nvCxnSpPr>
+          <p:cNvPr id="11" name="Connector 10"/>
+          <p:cNvCxnSpPr/>
+          <p:nvPr/>
+        </p:nvCxnSpPr>
+        <p:spPr>
+          <a:xfrm flipV="1">
+            <a:off x="0" y="1224000"/>
+            <a:ext cx="518400" cy="518400"/>
+          </a:xfrm>
+          <a:prstGeom prst="line">
+            <a:avLst/>
+          </a:prstGeom>
+          <a:ln w="3600">
+            <a:solidFill>
+              <a:srgbClr val="C9D1E2"/>
+            </a:solidFill>
+          </a:ln>
+        </p:spPr>
+      </p:cxnSp>
+      <p:cxnSp>
+        <p:nvCxnSpPr>
+          <p:cNvPr id="12" name="Connector 11"/>
+          <p:cNvCxnSpPr/>
+          <p:nvPr/>
+        </p:nvCxnSpPr>
+        <p:spPr>
+          <a:xfrm flipV="1">
+            <a:off x="0" y="1224000"/>
+            <a:ext cx="576000" cy="576000"/>
+          </a:xfrm>
+          <a:prstGeom prst="line">
+            <a:avLst/>
+          </a:prstGeom>
+          <a:ln w="3600">
+            <a:solidFill>
+              <a:srgbClr val="C9D1E2"/>
+            </a:solidFill>
+          </a:ln>
+        </p:spPr>
+      </p:cxnSp>
+      <p:cxnSp>
+        <p:nvCxnSpPr>
+          <p:cNvPr id="13" name="Connector 12"/>
+          <p:cNvCxnSpPr/>
+          <p:nvPr/>
+        </p:nvCxnSpPr>
+        <p:spPr>
+          <a:xfrm flipV="1">
+            <a:off x="57600" y="1224000"/>
+            <a:ext cx="576000" cy="576000"/>
+          </a:xfrm>
+          <a:prstGeom prst="line">
+            <a:avLst/>
+          </a:prstGeom>
+          <a:ln w="3600">
+            <a:solidFill>
+              <a:srgbClr val="C9D1E2"/>
+            </a:solidFill>
+          </a:ln>
+        </p:spPr>
+      </p:cxnSp>
+      <p:cxnSp>
+        <p:nvCxnSpPr>
+          <p:cNvPr id="14" name="Connector 13"/>
+          <p:cNvCxnSpPr/>
+          <p:nvPr/>
+        </p:nvCxnSpPr>
+        <p:spPr>
+          <a:xfrm flipV="1">
+            <a:off x="115200" y="1224000"/>
+            <a:ext cx="576000" cy="576000"/>
+          </a:xfrm>
+          <a:prstGeom prst="line">
+            <a:avLst/>
+          </a:prstGeom>
+          <a:ln w="3600">
+            <a:solidFill>
+              <a:srgbClr val="C9D1E2"/>
+            </a:solidFill>
+          </a:ln>
+        </p:spPr>
+      </p:cxnSp>
+      <p:cxnSp>
+        <p:nvCxnSpPr>
+          <p:cNvPr id="15" name="Connector 14"/>
+          <p:cNvCxnSpPr/>
+          <p:nvPr/>
+        </p:nvCxnSpPr>
+        <p:spPr>
+          <a:xfrm flipV="1">
+            <a:off x="172800" y="1224000"/>
+            <a:ext cx="576000" cy="576000"/>
+          </a:xfrm>
+          <a:prstGeom prst="line">
+            <a:avLst/>
+          </a:prstGeom>
+          <a:ln w="3600">
+            <a:solidFill>
+              <a:srgbClr val="C9D1E2"/>
+            </a:solidFill>
+          </a:ln>
+        </p:spPr>
+      </p:cxnSp>
+      <p:cxnSp>
+        <p:nvCxnSpPr>
+          <p:cNvPr id="16" name="Connector 15"/>
+          <p:cNvCxnSpPr/>
+          <p:nvPr/>
+        </p:nvCxnSpPr>
+        <p:spPr>
+          <a:xfrm flipV="1">
+            <a:off x="230400" y="1224000"/>
+            <a:ext cx="576000" cy="576000"/>
+          </a:xfrm>
+          <a:prstGeom prst="line">
+            <a:avLst/>
+          </a:prstGeom>
+          <a:ln w="3600">
+            <a:solidFill>
+              <a:srgbClr val="C9D1E2"/>
+            </a:solidFill>
+          </a:ln>
+        </p:spPr>
+      </p:cxnSp>
+      <p:cxnSp>
+        <p:nvCxnSpPr>
+          <p:cNvPr id="17" name="Connector 16"/>
+          <p:cNvCxnSpPr/>
+          <p:nvPr/>
+        </p:nvCxnSpPr>
+        <p:spPr>
+          <a:xfrm flipV="1">
+            <a:off x="288000" y="1224000"/>
+            <a:ext cx="576000" cy="576000"/>
+          </a:xfrm>
+          <a:prstGeom prst="line">
+            <a:avLst/>
+          </a:prstGeom>
+          <a:ln w="3600">
+            <a:solidFill>
+              <a:srgbClr val="C9D1E2"/>
+            </a:solidFill>
+          </a:ln>
+        </p:spPr>
+      </p:cxnSp>
+      <p:cxnSp>
+        <p:nvCxnSpPr>
+          <p:cNvPr id="18" name="Connector 17"/>
+          <p:cNvCxnSpPr/>
+          <p:nvPr/>
+        </p:nvCxnSpPr>
+        <p:spPr>
+          <a:xfrm flipV="1">
+            <a:off x="345600" y="1224000"/>
+            <a:ext cx="576000" cy="576000"/>
+          </a:xfrm>
+          <a:prstGeom prst="line">
+            <a:avLst/>
+          </a:prstGeom>
+          <a:ln w="3600">
+            <a:solidFill>
+              <a:srgbClr val="C9D1E2"/>
+            </a:solidFill>
+          </a:ln>
+        </p:spPr>
+      </p:cxnSp>
+      <p:cxnSp>
+        <p:nvCxnSpPr>
+          <p:cNvPr id="19" name="Connector 18"/>
+          <p:cNvCxnSpPr/>
+          <p:nvPr/>
+        </p:nvCxnSpPr>
+        <p:spPr>
+          <a:xfrm flipV="1">
+            <a:off x="403200" y="1224000"/>
+            <a:ext cx="576000" cy="576000"/>
+          </a:xfrm>
+          <a:prstGeom prst="line">
+            <a:avLst/>
+          </a:prstGeom>
+          <a:ln w="3600">
+            <a:solidFill>
+              <a:srgbClr val="C9D1E2"/>
+            </a:solidFill>
+          </a:ln>
+        </p:spPr>
+      </p:cxnSp>
+      <p:cxnSp>
+        <p:nvCxnSpPr>
+          <p:cNvPr id="20" name="Connector 19"/>
+          <p:cNvCxnSpPr/>
+          <p:nvPr/>
+        </p:nvCxnSpPr>
+        <p:spPr>
+          <a:xfrm flipV="1">
+            <a:off x="460800" y="1224000"/>
+            <a:ext cx="576000" cy="576000"/>
+          </a:xfrm>
+          <a:prstGeom prst="line">
+            <a:avLst/>
+          </a:prstGeom>
+          <a:ln w="3600">
+            <a:solidFill>
+              <a:srgbClr val="C9D1E2"/>
+            </a:solidFill>
+          </a:ln>
+        </p:spPr>
+      </p:cxnSp>
+      <p:cxnSp>
+        <p:nvCxnSpPr>
+          <p:cNvPr id="21" name="Connector 20"/>
+          <p:cNvCxnSpPr/>
+          <p:nvPr/>
+        </p:nvCxnSpPr>
+        <p:spPr>
+          <a:xfrm flipV="1">
+            <a:off x="518400" y="1224000"/>
+            <a:ext cx="576000" cy="576000"/>
+          </a:xfrm>
+          <a:prstGeom prst="line">
+            <a:avLst/>
+          </a:prstGeom>
+          <a:ln w="3600">
+            <a:solidFill>
+              <a:srgbClr val="C9D1E2"/>
+            </a:solidFill>
+          </a:ln>
+        </p:spPr>
+      </p:cxnSp>
+      <p:cxnSp>
+        <p:nvCxnSpPr>
+          <p:cNvPr id="22" name="Connector 21"/>
+          <p:cNvCxnSpPr/>
+          <p:nvPr/>
+        </p:nvCxnSpPr>
+        <p:spPr>
+          <a:xfrm flipV="1">
+            <a:off x="576000" y="1224000"/>
+            <a:ext cx="576000" cy="576000"/>
+          </a:xfrm>
+          <a:prstGeom prst="line">
+            <a:avLst/>
+          </a:prstGeom>
+          <a:ln w="3600">
+            <a:solidFill>
+              <a:srgbClr val="C9D1E2"/>
+            </a:solidFill>
+          </a:ln>
+        </p:spPr>
+      </p:cxnSp>
+      <p:cxnSp>
+        <p:nvCxnSpPr>
+          <p:cNvPr id="23" name="Connector 22"/>
+          <p:cNvCxnSpPr/>
+          <p:nvPr/>
+        </p:nvCxnSpPr>
+        <p:spPr>
+          <a:xfrm flipV="1">
+            <a:off x="633600" y="1245600"/>
+            <a:ext cx="554400" cy="554400"/>
+          </a:xfrm>
+          <a:prstGeom prst="line">
+            <a:avLst/>
+          </a:prstGeom>
+          <a:ln w="3600">
+            <a:solidFill>
+              <a:srgbClr val="C9D1E2"/>
+            </a:solidFill>
+          </a:ln>
+        </p:spPr>
+      </p:cxnSp>
+      <p:cxnSp>
+        <p:nvCxnSpPr>
+          <p:cNvPr id="24" name="Connector 23"/>
+          <p:cNvCxnSpPr/>
+          <p:nvPr/>
+        </p:nvCxnSpPr>
+        <p:spPr>
+          <a:xfrm flipV="1">
+            <a:off x="691200" y="1303200"/>
+            <a:ext cx="496800" cy="496800"/>
+          </a:xfrm>
+          <a:prstGeom prst="line">
+            <a:avLst/>
+          </a:prstGeom>
+          <a:ln w="3600">
+            <a:solidFill>
+              <a:srgbClr val="C9D1E2"/>
+            </a:solidFill>
+          </a:ln>
+        </p:spPr>
+      </p:cxnSp>
+      <p:cxnSp>
+        <p:nvCxnSpPr>
+          <p:cNvPr id="25" name="Connector 24"/>
+          <p:cNvCxnSpPr/>
+          <p:nvPr/>
+        </p:nvCxnSpPr>
+        <p:spPr>
+          <a:xfrm flipV="1">
+            <a:off x="748800" y="1360800"/>
+            <a:ext cx="439200" cy="439200"/>
+          </a:xfrm>
+          <a:prstGeom prst="line">
+            <a:avLst/>
+          </a:prstGeom>
+          <a:ln w="3600">
+            <a:solidFill>
+              <a:srgbClr val="C9D1E2"/>
+            </a:solidFill>
+          </a:ln>
+        </p:spPr>
+      </p:cxnSp>
+      <p:cxnSp>
+        <p:nvCxnSpPr>
+          <p:cNvPr id="26" name="Connector 25"/>
+          <p:cNvCxnSpPr/>
+          <p:nvPr/>
+        </p:nvCxnSpPr>
+        <p:spPr>
+          <a:xfrm flipV="1">
+            <a:off x="806400" y="1418400"/>
+            <a:ext cx="381600" cy="381600"/>
+          </a:xfrm>
+          <a:prstGeom prst="line">
+            <a:avLst/>
+          </a:prstGeom>
+          <a:ln w="3600">
+            <a:solidFill>
+              <a:srgbClr val="C9D1E2"/>
+            </a:solidFill>
+          </a:ln>
+        </p:spPr>
+      </p:cxnSp>
+      <p:cxnSp>
+        <p:nvCxnSpPr>
+          <p:cNvPr id="27" name="Connector 26"/>
+          <p:cNvCxnSpPr/>
+          <p:nvPr/>
+        </p:nvCxnSpPr>
+        <p:spPr>
+          <a:xfrm flipV="1">
+            <a:off x="864000" y="1476000"/>
+            <a:ext cx="324000" cy="324000"/>
+          </a:xfrm>
+          <a:prstGeom prst="line">
+            <a:avLst/>
+          </a:prstGeom>
+          <a:ln w="3600">
+            <a:solidFill>
+              <a:srgbClr val="C9D1E2"/>
+            </a:solidFill>
+          </a:ln>
+        </p:spPr>
+      </p:cxnSp>
+      <p:cxnSp>
+        <p:nvCxnSpPr>
+          <p:cNvPr id="28" name="Connector 27"/>
+          <p:cNvCxnSpPr/>
+          <p:nvPr/>
+        </p:nvCxnSpPr>
+        <p:spPr>
+          <a:xfrm flipV="1">
+            <a:off x="921600" y="1533600"/>
+            <a:ext cx="266400" cy="266400"/>
+          </a:xfrm>
+          <a:prstGeom prst="line">
+            <a:avLst/>
+          </a:prstGeom>
+          <a:ln w="3600">
+            <a:solidFill>
+              <a:srgbClr val="C9D1E2"/>
+            </a:solidFill>
+          </a:ln>
+        </p:spPr>
+      </p:cxnSp>
+      <p:cxnSp>
+        <p:nvCxnSpPr>
+          <p:cNvPr id="29" name="Connector 28"/>
+          <p:cNvCxnSpPr/>
+          <p:nvPr/>
+        </p:nvCxnSpPr>
+        <p:spPr>
+          <a:xfrm flipV="1">
+            <a:off x="979200" y="1591200"/>
+            <a:ext cx="208800" cy="208800"/>
+          </a:xfrm>
+          <a:prstGeom prst="line">
+            <a:avLst/>
+          </a:prstGeom>
+          <a:ln w="3600">
+            <a:solidFill>
+              <a:srgbClr val="C9D1E2"/>
+            </a:solidFill>
+          </a:ln>
+        </p:spPr>
+      </p:cxnSp>
+      <p:cxnSp>
+        <p:nvCxnSpPr>
+          <p:cNvPr id="30" name="Connector 29"/>
+          <p:cNvCxnSpPr/>
+          <p:nvPr/>
+        </p:nvCxnSpPr>
+        <p:spPr>
+          <a:xfrm flipV="1">
+            <a:off x="1036800" y="1648800"/>
+            <a:ext cx="151200" cy="151200"/>
+          </a:xfrm>
+          <a:prstGeom prst="line">
+            <a:avLst/>
+          </a:prstGeom>
+          <a:ln w="3600">
+            <a:solidFill>
+              <a:srgbClr val="C9D1E2"/>
+            </a:solidFill>
+          </a:ln>
+        </p:spPr>
+      </p:cxnSp>
+      <p:cxnSp>
+        <p:nvCxnSpPr>
+          <p:cNvPr id="31" name="Connector 30"/>
+          <p:cNvCxnSpPr/>
+          <p:nvPr/>
+        </p:nvCxnSpPr>
+        <p:spPr>
+          <a:xfrm flipV="1">
+            <a:off x="1094400" y="1706400"/>
+            <a:ext cx="93600" cy="93600"/>
+          </a:xfrm>
+          <a:prstGeom prst="line">
+            <a:avLst/>
+          </a:prstGeom>
+          <a:ln w="3600">
+            <a:solidFill>
+              <a:srgbClr val="C9D1E2"/>
+            </a:solidFill>
+          </a:ln>
+        </p:spPr>
+      </p:cxnSp>
+      <p:cxnSp>
+        <p:nvCxnSpPr>
+          <p:cNvPr id="32" name="Connector 31"/>
+          <p:cNvCxnSpPr/>
+          <p:nvPr/>
+        </p:nvCxnSpPr>
+        <p:spPr>
+          <a:xfrm flipV="1">
+            <a:off x="1152000" y="1764000"/>
+            <a:ext cx="36000" cy="36000"/>
+          </a:xfrm>
+          <a:prstGeom prst="line">
+            <a:avLst/>
+          </a:prstGeom>
+          <a:ln w="3600">
+            <a:solidFill>
+              <a:srgbClr val="C9D1E2"/>
+            </a:solidFill>
+          </a:ln>
+        </p:spPr>
+      </p:cxnSp>
+      <p:sp>
+        <p:nvSpPr>
+          <p:cNvPr id="33" name="Oval 32"/>
           <p:cNvSpPr/>
           <p:nvPr/>
         </p:nvSpPr>
         <p:spPr>
           <a:xfrm>
-            <a:off x="2397600" y="633600"/>
-            <a:ext cx="532800" cy="532800"/>
+            <a:off x="216000" y="252000"/>
+            <a:ext cx="288000" cy="288000"/>
           </a:xfrm>
           <a:prstGeom prst="ellipse">
             <a:avLst/>
           </a:prstGeom>
           <a:noFill/>
-          <a:ln w="10800">
+          <a:ln w="5760">
             <a:solidFill>
               <a:srgbClr val="FFFFFF"/>
             </a:solidFill>
@@ -3441,14 +4271,14 @@
       </p:sp>
       <p:sp>
         <p:nvSpPr>
-          <p:cNvPr id="4" name="텍스트"/>
+          <p:cNvPr id="34" name="텍스트"/>
           <p:cNvSpPr txBox="1"/>
           <p:nvPr/>
         </p:nvSpPr>
         <p:spPr>
           <a:xfrm>
-            <a:off x="2304000" y="684000"/>
-            <a:ext cx="720000" cy="432000"/>
+            <a:off x="216000" y="252000"/>
+            <a:ext cx="288000" cy="288000"/>
           </a:xfrm>
           <a:prstGeom prst="rect">
             <a:avLst/>
@@ -3463,11 +4293,11 @@
           <a:p>
             <a:pPr algn="ctr">
               <a:lnSpc>
-                <a:spcPts val="4350"/>
+                <a:spcPts val="2030"/>
               </a:lnSpc>
             </a:pPr>
             <a:r>
-              <a:rPr sz="3000" b="1">
+              <a:rPr sz="1400" b="1">
                 <a:solidFill>
                   <a:srgbClr val="FFFFFF"/>
                 </a:solidFill>
@@ -3481,14 +4311,14 @@
       </p:sp>
       <p:sp>
         <p:nvSpPr>
-          <p:cNvPr id="5" name="텍스트"/>
+          <p:cNvPr id="35" name="텍스트"/>
           <p:cNvSpPr txBox="1"/>
           <p:nvPr/>
         </p:nvSpPr>
         <p:spPr>
           <a:xfrm>
-            <a:off x="252000" y="540000"/>
-            <a:ext cx="1620000" cy="720000"/>
+            <a:off x="216000" y="1440000"/>
+            <a:ext cx="828000" cy="142876"/>
           </a:xfrm>
           <a:prstGeom prst="rect">
             <a:avLst/>
@@ -3503,49 +4333,154 @@
           <a:p>
             <a:pPr algn="l">
               <a:lnSpc>
-                <a:spcPts val="1739"/>
+                <a:spcPts val="1087"/>
               </a:lnSpc>
             </a:pPr>
             <a:r>
-              <a:rPr sz="1200" b="1">
+              <a:rPr sz="750" b="1" spc="100">
                 <a:solidFill>
                   <a:srgbClr val="FFFFFF"/>
                 </a:solidFill>
                 <a:latin typeface="맑은 고딕"/>
                 <a:ea typeface="맑은 고딕"/>
               </a:rPr>
-              <a:t>작은 수리에도</a:t>
-            </a:r>
-          </a:p>
+              <a:t>취급 품목</a:t>
+            </a:r>
+          </a:p>
+        </p:txBody>
+      </p:sp>
+      <p:sp>
+        <p:nvSpPr>
+          <p:cNvPr id="36" name="텍스트"/>
+          <p:cNvSpPr txBox="1"/>
+          <p:nvPr/>
+        </p:nvSpPr>
+        <p:spPr>
+          <a:xfrm>
+            <a:off x="1440000" y="223200"/>
+            <a:ext cx="1080000" cy="99061"/>
+          </a:xfrm>
+          <a:prstGeom prst="rect">
+            <a:avLst/>
+          </a:prstGeom>
+          <a:noFill/>
+        </p:spPr>
+        <p:txBody>
+          <a:bodyPr wrap="square" lIns="0" rIns="0" tIns="0" bIns="0" anchor="t">
+            <a:spAutoFit/>
+          </a:bodyPr>
+          <a:lstStyle/>
           <a:p>
             <a:pPr algn="l">
               <a:lnSpc>
-                <a:spcPts val="1739"/>
+                <a:spcPts val="754"/>
               </a:lnSpc>
             </a:pPr>
             <a:r>
-              <a:rPr sz="1200" b="1">
+              <a:rPr sz="520" b="1" spc="240">
+                <a:solidFill>
+                  <a:srgbClr val="C9D1E2"/>
+                </a:solidFill>
+                <a:latin typeface="맑은 고딕"/>
+                <a:ea typeface="맑은 고딕"/>
+              </a:rPr>
+              <a:t>취급 품목</a:t>
+            </a:r>
+          </a:p>
+        </p:txBody>
+      </p:sp>
+      <p:cxnSp>
+        <p:nvCxnSpPr>
+          <p:cNvPr id="37" name="Connector 36"/>
+          <p:cNvCxnSpPr/>
+          <p:nvPr/>
+        </p:nvCxnSpPr>
+        <p:spPr>
+          <a:xfrm>
+            <a:off x="1440000" y="360000"/>
+            <a:ext cx="1548000" cy="0"/>
+          </a:xfrm>
+          <a:prstGeom prst="line">
+            <a:avLst/>
+          </a:prstGeom>
+          <a:ln w="3600">
+            <a:solidFill>
+              <a:srgbClr val="6C82AF"/>
+            </a:solidFill>
+          </a:ln>
+        </p:spPr>
+      </p:cxnSp>
+      <p:sp>
+        <p:nvSpPr>
+          <p:cNvPr id="38" name="텍스트"/>
+          <p:cNvSpPr txBox="1"/>
+          <p:nvPr/>
+        </p:nvSpPr>
+        <p:spPr>
+          <a:xfrm>
+            <a:off x="1440000" y="403200"/>
+            <a:ext cx="1296000" cy="133351"/>
+          </a:xfrm>
+          <a:prstGeom prst="rect">
+            <a:avLst/>
+          </a:prstGeom>
+          <a:noFill/>
+        </p:spPr>
+        <p:txBody>
+          <a:bodyPr wrap="square" lIns="0" rIns="0" tIns="0" bIns="0" anchor="t">
+            <a:spAutoFit/>
+          </a:bodyPr>
+          <a:lstStyle/>
+          <a:p>
+            <a:pPr algn="l">
+              <a:lnSpc>
+                <a:spcPts val="1015"/>
+              </a:lnSpc>
+            </a:pPr>
+            <a:r>
+              <a:rPr sz="700" b="0">
                 <a:solidFill>
                   <a:srgbClr val="FFFFFF"/>
                 </a:solidFill>
                 <a:latin typeface="맑은 고딕"/>
                 <a:ea typeface="맑은 고딕"/>
               </a:rPr>
-              <a:t>큰 책임을</a:t>
-            </a:r>
-          </a:p>
-        </p:txBody>
-      </p:sp>
-      <p:sp>
-        <p:nvSpPr>
-          <p:cNvPr id="6" name="텍스트"/>
+              <a:t>가전 수리</a:t>
+            </a:r>
+          </a:p>
+        </p:txBody>
+      </p:sp>
+      <p:cxnSp>
+        <p:nvCxnSpPr>
+          <p:cNvPr id="39" name="Connector 38"/>
+          <p:cNvCxnSpPr/>
+          <p:nvPr/>
+        </p:nvCxnSpPr>
+        <p:spPr>
+          <a:xfrm>
+            <a:off x="1440000" y="561600"/>
+            <a:ext cx="1548000" cy="0"/>
+          </a:xfrm>
+          <a:prstGeom prst="line">
+            <a:avLst/>
+          </a:prstGeom>
+          <a:ln w="3600">
+            <a:solidFill>
+              <a:srgbClr val="6C82AF"/>
+            </a:solidFill>
+          </a:ln>
+        </p:spPr>
+      </p:cxnSp>
+      <p:sp>
+        <p:nvSpPr>
+          <p:cNvPr id="40" name="텍스트"/>
           <p:cNvSpPr txBox="1"/>
           <p:nvPr/>
         </p:nvSpPr>
         <p:spPr>
           <a:xfrm>
-            <a:off x="252000" y="1512000"/>
-            <a:ext cx="1584000" cy="123826"/>
+            <a:off x="1440000" y="604800"/>
+            <a:ext cx="1296000" cy="133351"/>
           </a:xfrm>
           <a:prstGeom prst="rect">
             <a:avLst/>
@@ -3560,18 +4495,201 @@
           <a:p>
             <a:pPr algn="l">
               <a:lnSpc>
-                <a:spcPts val="942"/>
+                <a:spcPts val="1015"/>
               </a:lnSpc>
             </a:pPr>
             <a:r>
-              <a:rPr sz="650" b="1" spc="200">
+              <a:rPr sz="700" b="0">
+                <a:solidFill>
+                  <a:srgbClr val="FFFFFF"/>
+                </a:solidFill>
+                <a:latin typeface="맑은 고딕"/>
+                <a:ea typeface="맑은 고딕"/>
+              </a:rPr>
+              <a:t>도어락</a:t>
+            </a:r>
+          </a:p>
+        </p:txBody>
+      </p:sp>
+      <p:cxnSp>
+        <p:nvCxnSpPr>
+          <p:cNvPr id="41" name="Connector 40"/>
+          <p:cNvCxnSpPr/>
+          <p:nvPr/>
+        </p:nvCxnSpPr>
+        <p:spPr>
+          <a:xfrm>
+            <a:off x="1440000" y="763200"/>
+            <a:ext cx="1548000" cy="0"/>
+          </a:xfrm>
+          <a:prstGeom prst="line">
+            <a:avLst/>
+          </a:prstGeom>
+          <a:ln w="3600">
+            <a:solidFill>
+              <a:srgbClr val="6C82AF"/>
+            </a:solidFill>
+          </a:ln>
+        </p:spPr>
+      </p:cxnSp>
+      <p:sp>
+        <p:nvSpPr>
+          <p:cNvPr id="42" name="텍스트"/>
+          <p:cNvSpPr txBox="1"/>
+          <p:nvPr/>
+        </p:nvSpPr>
+        <p:spPr>
+          <a:xfrm>
+            <a:off x="1440000" y="806400"/>
+            <a:ext cx="1296000" cy="133351"/>
+          </a:xfrm>
+          <a:prstGeom prst="rect">
+            <a:avLst/>
+          </a:prstGeom>
+          <a:noFill/>
+        </p:spPr>
+        <p:txBody>
+          <a:bodyPr wrap="square" lIns="0" rIns="0" tIns="0" bIns="0" anchor="t">
+            <a:spAutoFit/>
+          </a:bodyPr>
+          <a:lstStyle/>
+          <a:p>
+            <a:pPr algn="l">
+              <a:lnSpc>
+                <a:spcPts val="1015"/>
+              </a:lnSpc>
+            </a:pPr>
+            <a:r>
+              <a:rPr sz="700" b="0">
+                <a:solidFill>
+                  <a:srgbClr val="FFFFFF"/>
+                </a:solidFill>
+                <a:latin typeface="맑은 고딕"/>
+                <a:ea typeface="맑은 고딕"/>
+              </a:rPr>
+              <a:t>반려동물 미용</a:t>
+            </a:r>
+          </a:p>
+        </p:txBody>
+      </p:sp>
+      <p:cxnSp>
+        <p:nvCxnSpPr>
+          <p:cNvPr id="43" name="Connector 42"/>
+          <p:cNvCxnSpPr/>
+          <p:nvPr/>
+        </p:nvCxnSpPr>
+        <p:spPr>
+          <a:xfrm>
+            <a:off x="1440000" y="964800"/>
+            <a:ext cx="1548000" cy="0"/>
+          </a:xfrm>
+          <a:prstGeom prst="line">
+            <a:avLst/>
+          </a:prstGeom>
+          <a:ln w="3600">
+            <a:solidFill>
+              <a:srgbClr val="6C82AF"/>
+            </a:solidFill>
+          </a:ln>
+        </p:spPr>
+      </p:cxnSp>
+      <p:sp>
+        <p:nvSpPr>
+          <p:cNvPr id="44" name="텍스트"/>
+          <p:cNvSpPr txBox="1"/>
+          <p:nvPr/>
+        </p:nvSpPr>
+        <p:spPr>
+          <a:xfrm>
+            <a:off x="1440000" y="1008000"/>
+            <a:ext cx="1296000" cy="133351"/>
+          </a:xfrm>
+          <a:prstGeom prst="rect">
+            <a:avLst/>
+          </a:prstGeom>
+          <a:noFill/>
+        </p:spPr>
+        <p:txBody>
+          <a:bodyPr wrap="square" lIns="0" rIns="0" tIns="0" bIns="0" anchor="t">
+            <a:spAutoFit/>
+          </a:bodyPr>
+          <a:lstStyle/>
+          <a:p>
+            <a:pPr algn="l">
+              <a:lnSpc>
+                <a:spcPts val="1015"/>
+              </a:lnSpc>
+            </a:pPr>
+            <a:r>
+              <a:rPr sz="700" b="0">
+                <a:solidFill>
+                  <a:srgbClr val="FFFFFF"/>
+                </a:solidFill>
+                <a:latin typeface="맑은 고딕"/>
+                <a:ea typeface="맑은 고딕"/>
+              </a:rPr>
+              <a:t>가구 제작</a:t>
+            </a:r>
+          </a:p>
+        </p:txBody>
+      </p:sp>
+      <p:cxnSp>
+        <p:nvCxnSpPr>
+          <p:cNvPr id="45" name="Connector 44"/>
+          <p:cNvCxnSpPr/>
+          <p:nvPr/>
+        </p:nvCxnSpPr>
+        <p:spPr>
+          <a:xfrm>
+            <a:off x="1440000" y="1166400"/>
+            <a:ext cx="1548000" cy="0"/>
+          </a:xfrm>
+          <a:prstGeom prst="line">
+            <a:avLst/>
+          </a:prstGeom>
+          <a:ln w="3600">
+            <a:solidFill>
+              <a:srgbClr val="6C82AF"/>
+            </a:solidFill>
+          </a:ln>
+        </p:spPr>
+      </p:cxnSp>
+      <p:sp>
+        <p:nvSpPr>
+          <p:cNvPr id="46" name="텍스트"/>
+          <p:cNvSpPr txBox="1"/>
+          <p:nvPr/>
+        </p:nvSpPr>
+        <p:spPr>
+          <a:xfrm>
+            <a:off x="1440000" y="1569600"/>
+            <a:ext cx="1548000" cy="114301"/>
+          </a:xfrm>
+          <a:prstGeom prst="rect">
+            <a:avLst/>
+          </a:prstGeom>
+          <a:noFill/>
+        </p:spPr>
+        <p:txBody>
+          <a:bodyPr wrap="square" lIns="0" rIns="0" tIns="0" bIns="0" anchor="t">
+            <a:spAutoFit/>
+          </a:bodyPr>
+          <a:lstStyle/>
+          <a:p>
+            <a:pPr algn="l">
+              <a:lnSpc>
+                <a:spcPts val="869"/>
+              </a:lnSpc>
+            </a:pPr>
+            <a:r>
+              <a:rPr sz="600" b="0">
                 <a:solidFill>
                   <a:srgbClr val="C9D1E2"/>
                 </a:solidFill>
                 <a:latin typeface="맑은 고딕"/>
                 <a:ea typeface="맑은 고딕"/>
               </a:rPr>
-              <a:t>상호명</a:t>
+              <a:t>월–토 09:00 – 18:00   |   @아이디</a:t>
             </a:r>
           </a:p>
         </p:txBody>
